--- a/ppt_storage/output.pptx
+++ b/ppt_storage/output.pptx
@@ -3144,7 +3144,7 @@
                   <a:srgbClr val="FFDF00"/>
                 </a:solidFill>
               </a:rPr>
-              <a:t>Our Solar System: A Cosmic Neighborhood</a:t>
+              <a:t>What is Shopping?</a:t>
             </a:r>
           </a:p>
         </p:txBody>
@@ -3177,7 +3177,7 @@
                   <a:srgbClr val="FFFFFF"/>
                 </a:solidFill>
               </a:rPr>
-              <a:t>The Solar System is our home in the vast universe.</a:t>
+              <a:t>The act of buying goods and services.</a:t>
             </a:r>
           </a:p>
           <a:p>
@@ -3187,7 +3187,7 @@
                   <a:srgbClr val="FFFFFF"/>
                 </a:solidFill>
               </a:rPr>
-              <a:t>It consists of the Sun, planets, dwarf planets, moons, asteroids, and comets.</a:t>
+              <a:t>It's a fundamental economic activity.</a:t>
             </a:r>
           </a:p>
           <a:p>
@@ -3197,7 +3197,17 @@
                   <a:srgbClr val="FFFFFF"/>
                 </a:solidFill>
               </a:rPr>
-              <a:t>Everything orbits around our star, the Sun.</a:t>
+              <a:t>Can be for needs or wants.</a:t>
+            </a:r>
+          </a:p>
+          <a:p>
+            <a:r>
+              <a:rPr sz="2200">
+                <a:solidFill>
+                  <a:srgbClr val="FFFFFF"/>
+                </a:solidFill>
+              </a:rPr>
+              <a:t>A common leisure activity.</a:t>
             </a:r>
           </a:p>
         </p:txBody>
@@ -3272,7 +3282,7 @@
                   <a:srgbClr val="FFDF00"/>
                 </a:solidFill>
               </a:rPr>
-              <a:t>The Sun: The Heart of Our System</a:t>
+              <a:t>Types of Shopping</a:t>
             </a:r>
           </a:p>
         </p:txBody>
@@ -3305,7 +3315,7 @@
                   <a:srgbClr val="FFFFFF"/>
                 </a:solidFill>
               </a:rPr>
-              <a:t>The Sun is a star, a giant ball of hot gas.</a:t>
+              <a:t>Online shopping for convenience.</a:t>
             </a:r>
           </a:p>
           <a:p>
@@ -3315,7 +3325,7 @@
                   <a:srgbClr val="FFFFFF"/>
                 </a:solidFill>
               </a:rPr>
-              <a:t>It provides light and heat essential for life on Earth.</a:t>
+              <a:t>In-store shopping for experience.</a:t>
             </a:r>
           </a:p>
           <a:p>
@@ -3325,7 +3335,17 @@
                   <a:srgbClr val="FFFFFF"/>
                 </a:solidFill>
               </a:rPr>
-              <a:t>Its immense gravity holds the entire Solar System together.</a:t>
+              <a:t>Window shopping for inspiration.</a:t>
+            </a:r>
+          </a:p>
+          <a:p>
+            <a:r>
+              <a:rPr sz="2200">
+                <a:solidFill>
+                  <a:srgbClr val="FFFFFF"/>
+                </a:solidFill>
+              </a:rPr>
+              <a:t>Bargain hunting for deals.</a:t>
             </a:r>
           </a:p>
         </p:txBody>
@@ -3400,7 +3420,7 @@
                   <a:srgbClr val="FFDF00"/>
                 </a:solidFill>
               </a:rPr>
-              <a:t>The Inner Planets: Rocky Worlds</a:t>
+              <a:t>Benefits of Shopping</a:t>
             </a:r>
           </a:p>
         </p:txBody>
@@ -3433,7 +3453,7 @@
                   <a:srgbClr val="FFFFFF"/>
                 </a:solidFill>
               </a:rPr>
-              <a:t>Mercury, Venus, Earth, and Mars are the inner, rocky planets.</a:t>
+              <a:t>Fulfills essential needs.</a:t>
             </a:r>
           </a:p>
           <a:p>
@@ -3443,7 +3463,7 @@
                   <a:srgbClr val="FFFFFF"/>
                 </a:solidFill>
               </a:rPr>
-              <a:t>They are closer to the Sun and have solid surfaces.</a:t>
+              <a:t>Provides desired items.</a:t>
             </a:r>
           </a:p>
           <a:p>
@@ -3453,7 +3473,17 @@
                   <a:srgbClr val="FFFFFF"/>
                 </a:solidFill>
               </a:rPr>
-              <a:t>Earth is unique for having liquid water and supporting life.</a:t>
+              <a:t>Can boost mood and happiness.</a:t>
+            </a:r>
+          </a:p>
+          <a:p>
+            <a:r>
+              <a:rPr sz="2200">
+                <a:solidFill>
+                  <a:srgbClr val="FFFFFF"/>
+                </a:solidFill>
+              </a:rPr>
+              <a:t>Supports businesses and economy.</a:t>
             </a:r>
           </a:p>
         </p:txBody>
@@ -3528,7 +3558,7 @@
                   <a:srgbClr val="FFDF00"/>
                 </a:solidFill>
               </a:rPr>
-              <a:t>The Outer Planets: Gas and Ice Giants</a:t>
+              <a:t>Smart Shopping Tips</a:t>
             </a:r>
           </a:p>
         </p:txBody>
@@ -3561,7 +3591,7 @@
                   <a:srgbClr val="FFFFFF"/>
                 </a:solidFill>
               </a:rPr>
-              <a:t>Jupiter, Saturn, Uranus, and Neptune are the outer planets.</a:t>
+              <a:t>Make a shopping list.</a:t>
             </a:r>
           </a:p>
           <a:p>
@@ -3571,7 +3601,7 @@
                   <a:srgbClr val="FFFFFF"/>
                 </a:solidFill>
               </a:rPr>
-              <a:t>They are much larger and composed mainly of gas and ice.</a:t>
+              <a:t>Compare prices before buying.</a:t>
             </a:r>
           </a:p>
           <a:p>
@@ -3581,7 +3611,17 @@
                   <a:srgbClr val="FFFFFF"/>
                 </a:solidFill>
               </a:rPr>
-              <a:t>Saturn is famous for its prominent rings.</a:t>
+              <a:t>Look for discounts and sales.</a:t>
+            </a:r>
+          </a:p>
+          <a:p>
+            <a:r>
+              <a:rPr sz="2200">
+                <a:solidFill>
+                  <a:srgbClr val="FFFFFF"/>
+                </a:solidFill>
+              </a:rPr>
+              <a:t>Avoid impulse purchases.</a:t>
             </a:r>
           </a:p>
         </p:txBody>
@@ -3656,7 +3696,7 @@
                   <a:srgbClr val="FFDF00"/>
                 </a:solidFill>
               </a:rPr>
-              <a:t>Beyond the Planets: Dwarf Planets and More</a:t>
+              <a:t>The Future of Shopping</a:t>
             </a:r>
           </a:p>
         </p:txBody>
@@ -3689,7 +3729,7 @@
                   <a:srgbClr val="FFFFFF"/>
                 </a:solidFill>
               </a:rPr>
-              <a:t>The asteroid belt lies between Mars and Jupiter.</a:t>
+              <a:t>Increasingly digital and personalized.</a:t>
             </a:r>
           </a:p>
           <a:p>
@@ -3699,7 +3739,7 @@
                   <a:srgbClr val="FFFFFF"/>
                 </a:solidFill>
               </a:rPr>
-              <a:t>Dwarf planets like Pluto reside in the outer Solar System.</a:t>
+              <a:t>Augmented reality for virtual try-ons.</a:t>
             </a:r>
           </a:p>
           <a:p>
@@ -3709,7 +3749,17 @@
                   <a:srgbClr val="FFFFFF"/>
                 </a:solidFill>
               </a:rPr>
-              <a:t>Comets and asteroids are remnants from the formation of the Solar System.</a:t>
+              <a:t>Faster delivery options.</a:t>
+            </a:r>
+          </a:p>
+          <a:p>
+            <a:r>
+              <a:rPr sz="2200">
+                <a:solidFill>
+                  <a:srgbClr val="FFFFFF"/>
+                </a:solidFill>
+              </a:rPr>
+              <a:t>Focus on sustainable choices.</a:t>
             </a:r>
           </a:p>
         </p:txBody>

--- a/ppt_storage/output.pptx
+++ b/ppt_storage/output.pptx
@@ -3144,7 +3144,7 @@
                   <a:srgbClr val="FFDF00"/>
                 </a:solidFill>
               </a:rPr>
-              <a:t>What is Shopping?</a:t>
+              <a:t>What is Cybersecurity?</a:t>
             </a:r>
           </a:p>
         </p:txBody>
@@ -3177,7 +3177,7 @@
                   <a:srgbClr val="FFFFFF"/>
                 </a:solidFill>
               </a:rPr>
-              <a:t>The act of buying goods and services.</a:t>
+              <a:t>Protecting digital systems and data.</a:t>
             </a:r>
           </a:p>
           <a:p>
@@ -3187,7 +3187,7 @@
                   <a:srgbClr val="FFFFFF"/>
                 </a:solidFill>
               </a:rPr>
-              <a:t>It's a fundamental economic activity.</a:t>
+              <a:t>Defending against cyber threats.</a:t>
             </a:r>
           </a:p>
           <a:p>
@@ -3197,7 +3197,7 @@
                   <a:srgbClr val="FFFFFF"/>
                 </a:solidFill>
               </a:rPr>
-              <a:t>Can be for needs or wants.</a:t>
+              <a:t>Ensuring confidentiality, integrity, and availability.</a:t>
             </a:r>
           </a:p>
           <a:p>
@@ -3207,7 +3207,7 @@
                   <a:srgbClr val="FFFFFF"/>
                 </a:solidFill>
               </a:rPr>
-              <a:t>A common leisure activity.</a:t>
+              <a:t>Safeguarding against unauthorized access.</a:t>
             </a:r>
           </a:p>
         </p:txBody>
@@ -3282,7 +3282,7 @@
                   <a:srgbClr val="FFDF00"/>
                 </a:solidFill>
               </a:rPr>
-              <a:t>Types of Shopping</a:t>
+              <a:t>Common Cyber Threats</a:t>
             </a:r>
           </a:p>
         </p:txBody>
@@ -3315,7 +3315,7 @@
                   <a:srgbClr val="FFFFFF"/>
                 </a:solidFill>
               </a:rPr>
-              <a:t>Online shopping for convenience.</a:t>
+              <a:t>Malware (viruses, ransomware).</a:t>
             </a:r>
           </a:p>
           <a:p>
@@ -3325,7 +3325,7 @@
                   <a:srgbClr val="FFFFFF"/>
                 </a:solidFill>
               </a:rPr>
-              <a:t>In-store shopping for experience.</a:t>
+              <a:t>Phishing and social engineering.</a:t>
             </a:r>
           </a:p>
           <a:p>
@@ -3335,7 +3335,7 @@
                   <a:srgbClr val="FFFFFF"/>
                 </a:solidFill>
               </a:rPr>
-              <a:t>Window shopping for inspiration.</a:t>
+              <a:t>Denial-of-Service (DoS) attacks.</a:t>
             </a:r>
           </a:p>
           <a:p>
@@ -3345,7 +3345,7 @@
                   <a:srgbClr val="FFFFFF"/>
                 </a:solidFill>
               </a:rPr>
-              <a:t>Bargain hunting for deals.</a:t>
+              <a:t>Data breaches and identity theft.</a:t>
             </a:r>
           </a:p>
         </p:txBody>
@@ -3420,7 +3420,7 @@
                   <a:srgbClr val="FFDF00"/>
                 </a:solidFill>
               </a:rPr>
-              <a:t>Benefits of Shopping</a:t>
+              <a:t>Key Cybersecurity Practices</a:t>
             </a:r>
           </a:p>
         </p:txBody>
@@ -3453,7 +3453,7 @@
                   <a:srgbClr val="FFFFFF"/>
                 </a:solidFill>
               </a:rPr>
-              <a:t>Fulfills essential needs.</a:t>
+              <a:t>Strong, unique passwords.</a:t>
             </a:r>
           </a:p>
           <a:p>
@@ -3463,7 +3463,7 @@
                   <a:srgbClr val="FFFFFF"/>
                 </a:solidFill>
               </a:rPr>
-              <a:t>Provides desired items.</a:t>
+              <a:t>Enable multi-factor authentication.</a:t>
             </a:r>
           </a:p>
           <a:p>
@@ -3473,7 +3473,7 @@
                   <a:srgbClr val="FFFFFF"/>
                 </a:solidFill>
               </a:rPr>
-              <a:t>Can boost mood and happiness.</a:t>
+              <a:t>Keep software updated.</a:t>
             </a:r>
           </a:p>
           <a:p>
@@ -3483,7 +3483,7 @@
                   <a:srgbClr val="FFFFFF"/>
                 </a:solidFill>
               </a:rPr>
-              <a:t>Supports businesses and economy.</a:t>
+              <a:t>Be cautious of suspicious links/emails.</a:t>
             </a:r>
           </a:p>
         </p:txBody>
@@ -3558,7 +3558,7 @@
                   <a:srgbClr val="FFDF00"/>
                 </a:solidFill>
               </a:rPr>
-              <a:t>Smart Shopping Tips</a:t>
+              <a:t>Protecting Your Data</a:t>
             </a:r>
           </a:p>
         </p:txBody>
@@ -3591,7 +3591,7 @@
                   <a:srgbClr val="FFFFFF"/>
                 </a:solidFill>
               </a:rPr>
-              <a:t>Make a shopping list.</a:t>
+              <a:t>Regularly back up important files.</a:t>
             </a:r>
           </a:p>
           <a:p>
@@ -3601,7 +3601,7 @@
                   <a:srgbClr val="FFFFFF"/>
                 </a:solidFill>
               </a:rPr>
-              <a:t>Compare prices before buying.</a:t>
+              <a:t>Encrypt sensitive information.</a:t>
             </a:r>
           </a:p>
           <a:p>
@@ -3611,7 +3611,7 @@
                   <a:srgbClr val="FFFFFF"/>
                 </a:solidFill>
               </a:rPr>
-              <a:t>Look for discounts and sales.</a:t>
+              <a:t>Use secure networks (VPNs).</a:t>
             </a:r>
           </a:p>
           <a:p>
@@ -3621,7 +3621,7 @@
                   <a:srgbClr val="FFFFFF"/>
                 </a:solidFill>
               </a:rPr>
-              <a:t>Avoid impulse purchases.</a:t>
+              <a:t>Limit personal information sharing.</a:t>
             </a:r>
           </a:p>
         </p:txBody>
@@ -3696,7 +3696,7 @@
                   <a:srgbClr val="FFDF00"/>
                 </a:solidFill>
               </a:rPr>
-              <a:t>The Future of Shopping</a:t>
+              <a:t>The Importance of Cybersecurity</a:t>
             </a:r>
           </a:p>
         </p:txBody>
@@ -3729,7 +3729,7 @@
                   <a:srgbClr val="FFFFFF"/>
                 </a:solidFill>
               </a:rPr>
-              <a:t>Increasingly digital and personalized.</a:t>
+              <a:t>Prevents financial losses.</a:t>
             </a:r>
           </a:p>
           <a:p>
@@ -3739,7 +3739,7 @@
                   <a:srgbClr val="FFFFFF"/>
                 </a:solidFill>
               </a:rPr>
-              <a:t>Augmented reality for virtual try-ons.</a:t>
+              <a:t>Maintains trust and reputation.</a:t>
             </a:r>
           </a:p>
           <a:p>
@@ -3749,7 +3749,7 @@
                   <a:srgbClr val="FFFFFF"/>
                 </a:solidFill>
               </a:rPr>
-              <a:t>Faster delivery options.</a:t>
+              <a:t>Protects personal privacy.</a:t>
             </a:r>
           </a:p>
           <a:p>
@@ -3759,7 +3759,7 @@
                   <a:srgbClr val="FFFFFF"/>
                 </a:solidFill>
               </a:rPr>
-              <a:t>Focus on sustainable choices.</a:t>
+              <a:t>Ensures business continuity.</a:t>
             </a:r>
           </a:p>
         </p:txBody>
